--- a/시스템 기획/아웃배틀 옵션/자료/메뉴 팝업.pptx
+++ b/시스템 기획/아웃배틀 옵션/자료/메뉴 팝업.pptx
@@ -260,7 +260,7 @@
           <a:p>
             <a:fld id="{DA2F05AD-DC08-4F6C-9164-0EAD3A5E84DB}" type="datetimeFigureOut">
               <a:rPr lang="ko-KR" altLang="en-US" smtClean="0"/>
-              <a:t>2025-10-10</a:t>
+              <a:t>2025-10-16</a:t>
             </a:fld>
             <a:endParaRPr lang="ko-KR" altLang="en-US"/>
           </a:p>
@@ -458,7 +458,7 @@
           <a:p>
             <a:fld id="{DA2F05AD-DC08-4F6C-9164-0EAD3A5E84DB}" type="datetimeFigureOut">
               <a:rPr lang="ko-KR" altLang="en-US" smtClean="0"/>
-              <a:t>2025-10-10</a:t>
+              <a:t>2025-10-16</a:t>
             </a:fld>
             <a:endParaRPr lang="ko-KR" altLang="en-US"/>
           </a:p>
@@ -666,7 +666,7 @@
           <a:p>
             <a:fld id="{DA2F05AD-DC08-4F6C-9164-0EAD3A5E84DB}" type="datetimeFigureOut">
               <a:rPr lang="ko-KR" altLang="en-US" smtClean="0"/>
-              <a:t>2025-10-10</a:t>
+              <a:t>2025-10-16</a:t>
             </a:fld>
             <a:endParaRPr lang="ko-KR" altLang="en-US"/>
           </a:p>
@@ -864,7 +864,7 @@
           <a:p>
             <a:fld id="{DA2F05AD-DC08-4F6C-9164-0EAD3A5E84DB}" type="datetimeFigureOut">
               <a:rPr lang="ko-KR" altLang="en-US" smtClean="0"/>
-              <a:t>2025-10-10</a:t>
+              <a:t>2025-10-16</a:t>
             </a:fld>
             <a:endParaRPr lang="ko-KR" altLang="en-US"/>
           </a:p>
@@ -1139,7 +1139,7 @@
           <a:p>
             <a:fld id="{DA2F05AD-DC08-4F6C-9164-0EAD3A5E84DB}" type="datetimeFigureOut">
               <a:rPr lang="ko-KR" altLang="en-US" smtClean="0"/>
-              <a:t>2025-10-10</a:t>
+              <a:t>2025-10-16</a:t>
             </a:fld>
             <a:endParaRPr lang="ko-KR" altLang="en-US"/>
           </a:p>
@@ -1404,7 +1404,7 @@
           <a:p>
             <a:fld id="{DA2F05AD-DC08-4F6C-9164-0EAD3A5E84DB}" type="datetimeFigureOut">
               <a:rPr lang="ko-KR" altLang="en-US" smtClean="0"/>
-              <a:t>2025-10-10</a:t>
+              <a:t>2025-10-16</a:t>
             </a:fld>
             <a:endParaRPr lang="ko-KR" altLang="en-US"/>
           </a:p>
@@ -1816,7 +1816,7 @@
           <a:p>
             <a:fld id="{DA2F05AD-DC08-4F6C-9164-0EAD3A5E84DB}" type="datetimeFigureOut">
               <a:rPr lang="ko-KR" altLang="en-US" smtClean="0"/>
-              <a:t>2025-10-10</a:t>
+              <a:t>2025-10-16</a:t>
             </a:fld>
             <a:endParaRPr lang="ko-KR" altLang="en-US"/>
           </a:p>
@@ -1957,7 +1957,7 @@
           <a:p>
             <a:fld id="{DA2F05AD-DC08-4F6C-9164-0EAD3A5E84DB}" type="datetimeFigureOut">
               <a:rPr lang="ko-KR" altLang="en-US" smtClean="0"/>
-              <a:t>2025-10-10</a:t>
+              <a:t>2025-10-16</a:t>
             </a:fld>
             <a:endParaRPr lang="ko-KR" altLang="en-US"/>
           </a:p>
@@ -2070,7 +2070,7 @@
           <a:p>
             <a:fld id="{DA2F05AD-DC08-4F6C-9164-0EAD3A5E84DB}" type="datetimeFigureOut">
               <a:rPr lang="ko-KR" altLang="en-US" smtClean="0"/>
-              <a:t>2025-10-10</a:t>
+              <a:t>2025-10-16</a:t>
             </a:fld>
             <a:endParaRPr lang="ko-KR" altLang="en-US"/>
           </a:p>
@@ -2381,7 +2381,7 @@
           <a:p>
             <a:fld id="{DA2F05AD-DC08-4F6C-9164-0EAD3A5E84DB}" type="datetimeFigureOut">
               <a:rPr lang="ko-KR" altLang="en-US" smtClean="0"/>
-              <a:t>2025-10-10</a:t>
+              <a:t>2025-10-16</a:t>
             </a:fld>
             <a:endParaRPr lang="ko-KR" altLang="en-US"/>
           </a:p>
@@ -2669,7 +2669,7 @@
           <a:p>
             <a:fld id="{DA2F05AD-DC08-4F6C-9164-0EAD3A5E84DB}" type="datetimeFigureOut">
               <a:rPr lang="ko-KR" altLang="en-US" smtClean="0"/>
-              <a:t>2025-10-10</a:t>
+              <a:t>2025-10-16</a:t>
             </a:fld>
             <a:endParaRPr lang="ko-KR" altLang="en-US"/>
           </a:p>
@@ -2910,7 +2910,7 @@
           <a:p>
             <a:fld id="{DA2F05AD-DC08-4F6C-9164-0EAD3A5E84DB}" type="datetimeFigureOut">
               <a:rPr lang="ko-KR" altLang="en-US" smtClean="0"/>
-              <a:t>2025-10-10</a:t>
+              <a:t>2025-10-16</a:t>
             </a:fld>
             <a:endParaRPr lang="ko-KR" altLang="en-US"/>
           </a:p>
@@ -3481,7 +3481,7 @@
         </p:nvGrpSpPr>
         <p:grpSpPr>
           <a:xfrm>
-            <a:off x="4535053" y="1662544"/>
+            <a:off x="4535053" y="2138661"/>
             <a:ext cx="3001818" cy="629669"/>
             <a:chOff x="4572000" y="1662545"/>
             <a:chExt cx="3001818" cy="629669"/>
@@ -3564,7 +3564,7 @@
               <a:pPr algn="ctr"/>
               <a:r>
                 <a:rPr lang="ko-KR" altLang="en-US"/>
-                <a:t>게임 저장</a:t>
+                <a:t>설정</a:t>
               </a:r>
             </a:p>
           </p:txBody>
@@ -3584,8 +3584,8 @@
         </p:nvGrpSpPr>
         <p:grpSpPr>
           <a:xfrm>
-            <a:off x="4535053" y="2469351"/>
-            <a:ext cx="3001818" cy="629669"/>
+            <a:off x="6871852" y="5600623"/>
+            <a:ext cx="1330038" cy="409047"/>
             <a:chOff x="4572000" y="1662545"/>
             <a:chExt cx="3001818" cy="629669"/>
           </a:xfrm>
@@ -3651,7 +3651,7 @@
           <p:spPr>
             <a:xfrm>
               <a:off x="4723939" y="1792713"/>
-              <a:ext cx="2752436" cy="369332"/>
+              <a:ext cx="2752436" cy="276999"/>
             </a:xfrm>
             <a:prstGeom prst="rect">
               <a:avLst/>
@@ -3666,8 +3666,8 @@
             <a:p>
               <a:pPr algn="ctr"/>
               <a:r>
-                <a:rPr lang="ko-KR" altLang="en-US"/>
-                <a:t>게임 불러오기</a:t>
+                <a:rPr lang="ko-KR" altLang="en-US" sz="1200"/>
+                <a:t>진척도 초기화</a:t>
               </a:r>
             </a:p>
           </p:txBody>
@@ -3687,7 +3687,7 @@
         </p:nvGrpSpPr>
         <p:grpSpPr>
           <a:xfrm>
-            <a:off x="4535053" y="3276158"/>
+            <a:off x="4544288" y="2948796"/>
             <a:ext cx="3001818" cy="629669"/>
             <a:chOff x="4572000" y="1662545"/>
             <a:chExt cx="3001818" cy="629669"/>
@@ -3770,7 +3770,7 @@
               <a:pPr algn="ctr"/>
               <a:r>
                 <a:rPr lang="ko-KR" altLang="en-US"/>
-                <a:t>설정</a:t>
+                <a:t>크레딧</a:t>
               </a:r>
             </a:p>
           </p:txBody>
@@ -3790,7 +3790,7 @@
         </p:nvGrpSpPr>
         <p:grpSpPr>
           <a:xfrm>
-            <a:off x="4535053" y="4082964"/>
+            <a:off x="4544288" y="3755602"/>
             <a:ext cx="3001818" cy="629669"/>
             <a:chOff x="4572000" y="1662545"/>
             <a:chExt cx="3001818" cy="629669"/>
@@ -4292,7 +4292,7 @@
         </p:nvSpPr>
         <p:spPr>
           <a:xfrm>
-            <a:off x="9149750" y="3046107"/>
+            <a:off x="9097814" y="3095435"/>
             <a:ext cx="738909" cy="720437"/>
           </a:xfrm>
           <a:prstGeom prst="ellipse">
@@ -4342,8 +4342,8 @@
         </p:nvSpPr>
         <p:spPr>
           <a:xfrm>
-            <a:off x="7536873" y="1681018"/>
-            <a:ext cx="406400" cy="3029527"/>
+            <a:off x="7546108" y="2138661"/>
+            <a:ext cx="406400" cy="2244522"/>
           </a:xfrm>
           <a:custGeom>
             <a:avLst/>
@@ -4428,13 +4428,12 @@
           </p:cNvPr>
           <p:cNvCxnSpPr>
             <a:cxnSpLocks/>
-            <a:endCxn id="27" idx="2"/>
           </p:cNvCxnSpPr>
           <p:nvPr/>
         </p:nvCxnSpPr>
         <p:spPr>
           <a:xfrm>
-            <a:off x="7943273" y="3276157"/>
+            <a:off x="7952508" y="3309013"/>
             <a:ext cx="1206477" cy="130169"/>
           </a:xfrm>
           <a:prstGeom prst="line">
@@ -4461,6 +4460,99 @@
           </a:fontRef>
         </p:style>
       </p:cxnSp>
+      <p:cxnSp>
+        <p:nvCxnSpPr>
+          <p:cNvPr id="14" name="직선 연결선 13">
+            <a:extLst>
+              <a:ext uri="{FF2B5EF4-FFF2-40B4-BE49-F238E27FC236}">
+                <a16:creationId xmlns:a16="http://schemas.microsoft.com/office/drawing/2014/main" id="{DF2765DE-4342-60AE-5A3C-078738091F26}"/>
+              </a:ext>
+            </a:extLst>
+          </p:cNvPr>
+          <p:cNvCxnSpPr>
+            <a:cxnSpLocks/>
+          </p:cNvCxnSpPr>
+          <p:nvPr/>
+        </p:nvCxnSpPr>
+        <p:spPr>
+          <a:xfrm>
+            <a:off x="8174181" y="5804422"/>
+            <a:ext cx="1206477" cy="130169"/>
+          </a:xfrm>
+          <a:prstGeom prst="line">
+            <a:avLst/>
+          </a:prstGeom>
+          <a:ln>
+            <a:solidFill>
+              <a:schemeClr val="tx1"/>
+            </a:solidFill>
+          </a:ln>
+        </p:spPr>
+        <p:style>
+          <a:lnRef idx="1">
+            <a:schemeClr val="accent1"/>
+          </a:lnRef>
+          <a:fillRef idx="0">
+            <a:schemeClr val="accent1"/>
+          </a:fillRef>
+          <a:effectRef idx="0">
+            <a:schemeClr val="accent1"/>
+          </a:effectRef>
+          <a:fontRef idx="minor">
+            <a:schemeClr val="tx1"/>
+          </a:fontRef>
+        </p:style>
+      </p:cxnSp>
+      <p:sp>
+        <p:nvSpPr>
+          <p:cNvPr id="18" name="타원 17">
+            <a:extLst>
+              <a:ext uri="{FF2B5EF4-FFF2-40B4-BE49-F238E27FC236}">
+                <a16:creationId xmlns:a16="http://schemas.microsoft.com/office/drawing/2014/main" id="{52DC49B9-F846-190F-E248-1BDF3B7A6F4A}"/>
+              </a:ext>
+            </a:extLst>
+          </p:cNvPr>
+          <p:cNvSpPr/>
+          <p:nvPr/>
+        </p:nvSpPr>
+        <p:spPr>
+          <a:xfrm>
+            <a:off x="9245600" y="5591781"/>
+            <a:ext cx="738909" cy="720437"/>
+          </a:xfrm>
+          <a:prstGeom prst="ellipse">
+            <a:avLst/>
+          </a:prstGeom>
+        </p:spPr>
+        <p:style>
+          <a:lnRef idx="2">
+            <a:schemeClr val="accent1">
+              <a:shade val="15000"/>
+            </a:schemeClr>
+          </a:lnRef>
+          <a:fillRef idx="1">
+            <a:schemeClr val="accent1"/>
+          </a:fillRef>
+          <a:effectRef idx="0">
+            <a:schemeClr val="accent1"/>
+          </a:effectRef>
+          <a:fontRef idx="minor">
+            <a:schemeClr val="lt1"/>
+          </a:fontRef>
+        </p:style>
+        <p:txBody>
+          <a:bodyPr rtlCol="0" anchor="ctr"/>
+          <a:lstStyle/>
+          <a:p>
+            <a:pPr algn="ctr"/>
+            <a:r>
+              <a:rPr lang="en-US" altLang="ko-KR"/>
+              <a:t>5</a:t>
+            </a:r>
+            <a:endParaRPr lang="ko-KR" altLang="en-US"/>
+          </a:p>
+        </p:txBody>
+      </p:sp>
     </p:spTree>
     <p:extLst>
       <p:ext uri="{BB962C8B-B14F-4D97-AF65-F5344CB8AC3E}">
@@ -4631,521 +4723,6 @@
           </a:p>
         </p:txBody>
       </p:sp>
-      <p:grpSp>
-        <p:nvGrpSpPr>
-          <p:cNvPr id="7" name="그룹 6">
-            <a:extLst>
-              <a:ext uri="{FF2B5EF4-FFF2-40B4-BE49-F238E27FC236}">
-                <a16:creationId xmlns:a16="http://schemas.microsoft.com/office/drawing/2014/main" id="{7E765CB7-0EF7-EFB7-C94C-A5C19DEA86D1}"/>
-              </a:ext>
-            </a:extLst>
-          </p:cNvPr>
-          <p:cNvGrpSpPr/>
-          <p:nvPr/>
-        </p:nvGrpSpPr>
-        <p:grpSpPr>
-          <a:xfrm>
-            <a:off x="4535053" y="1662544"/>
-            <a:ext cx="3001818" cy="629669"/>
-            <a:chOff x="4572000" y="1662545"/>
-            <a:chExt cx="3001818" cy="629669"/>
-          </a:xfrm>
-        </p:grpSpPr>
-        <p:sp>
-          <p:nvSpPr>
-            <p:cNvPr id="6" name="순서도: 처리 5">
-              <a:extLst>
-                <a:ext uri="{FF2B5EF4-FFF2-40B4-BE49-F238E27FC236}">
-                  <a16:creationId xmlns:a16="http://schemas.microsoft.com/office/drawing/2014/main" id="{613011BC-6790-362A-4FDC-AED936A838FA}"/>
-                </a:ext>
-              </a:extLst>
-            </p:cNvPr>
-            <p:cNvSpPr/>
-            <p:nvPr/>
-          </p:nvSpPr>
-          <p:spPr>
-            <a:xfrm>
-              <a:off x="4572000" y="1662545"/>
-              <a:ext cx="3001818" cy="629669"/>
-            </a:xfrm>
-            <a:prstGeom prst="flowChartProcess">
-              <a:avLst/>
-            </a:prstGeom>
-          </p:spPr>
-          <p:style>
-            <a:lnRef idx="2">
-              <a:schemeClr val="accent1">
-                <a:shade val="15000"/>
-              </a:schemeClr>
-            </a:lnRef>
-            <a:fillRef idx="1">
-              <a:schemeClr val="accent1"/>
-            </a:fillRef>
-            <a:effectRef idx="0">
-              <a:schemeClr val="accent1"/>
-            </a:effectRef>
-            <a:fontRef idx="minor">
-              <a:schemeClr val="lt1"/>
-            </a:fontRef>
-          </p:style>
-          <p:txBody>
-            <a:bodyPr rtlCol="0" anchor="ctr"/>
-            <a:lstStyle/>
-            <a:p>
-              <a:pPr algn="ctr"/>
-              <a:endParaRPr lang="ko-KR" altLang="en-US"/>
-            </a:p>
-          </p:txBody>
-        </p:sp>
-        <p:sp>
-          <p:nvSpPr>
-            <p:cNvPr id="5" name="TextBox 4">
-              <a:extLst>
-                <a:ext uri="{FF2B5EF4-FFF2-40B4-BE49-F238E27FC236}">
-                  <a16:creationId xmlns:a16="http://schemas.microsoft.com/office/drawing/2014/main" id="{FA37CC9C-D954-DCDC-6A26-8BC2BB9385BA}"/>
-                </a:ext>
-              </a:extLst>
-            </p:cNvPr>
-            <p:cNvSpPr txBox="1"/>
-            <p:nvPr/>
-          </p:nvSpPr>
-          <p:spPr>
-            <a:xfrm>
-              <a:off x="4723939" y="1792713"/>
-              <a:ext cx="2752436" cy="369332"/>
-            </a:xfrm>
-            <a:prstGeom prst="rect">
-              <a:avLst/>
-            </a:prstGeom>
-            <a:noFill/>
-          </p:spPr>
-          <p:txBody>
-            <a:bodyPr wrap="square" rtlCol="0">
-              <a:spAutoFit/>
-            </a:bodyPr>
-            <a:lstStyle/>
-            <a:p>
-              <a:pPr algn="ctr"/>
-              <a:r>
-                <a:rPr lang="ko-KR" altLang="en-US"/>
-                <a:t>게임 저장</a:t>
-              </a:r>
-            </a:p>
-          </p:txBody>
-        </p:sp>
-      </p:grpSp>
-      <p:grpSp>
-        <p:nvGrpSpPr>
-          <p:cNvPr id="8" name="그룹 7">
-            <a:extLst>
-              <a:ext uri="{FF2B5EF4-FFF2-40B4-BE49-F238E27FC236}">
-                <a16:creationId xmlns:a16="http://schemas.microsoft.com/office/drawing/2014/main" id="{36E2F421-9385-E074-A608-23DDADF7713B}"/>
-              </a:ext>
-            </a:extLst>
-          </p:cNvPr>
-          <p:cNvGrpSpPr/>
-          <p:nvPr/>
-        </p:nvGrpSpPr>
-        <p:grpSpPr>
-          <a:xfrm>
-            <a:off x="4535053" y="2469351"/>
-            <a:ext cx="3001818" cy="629669"/>
-            <a:chOff x="4572000" y="1662545"/>
-            <a:chExt cx="3001818" cy="629669"/>
-          </a:xfrm>
-        </p:grpSpPr>
-        <p:sp>
-          <p:nvSpPr>
-            <p:cNvPr id="9" name="순서도: 처리 8">
-              <a:extLst>
-                <a:ext uri="{FF2B5EF4-FFF2-40B4-BE49-F238E27FC236}">
-                  <a16:creationId xmlns:a16="http://schemas.microsoft.com/office/drawing/2014/main" id="{1DB58A82-49BA-0157-3FEC-771242BF9941}"/>
-                </a:ext>
-              </a:extLst>
-            </p:cNvPr>
-            <p:cNvSpPr/>
-            <p:nvPr/>
-          </p:nvSpPr>
-          <p:spPr>
-            <a:xfrm>
-              <a:off x="4572000" y="1662545"/>
-              <a:ext cx="3001818" cy="629669"/>
-            </a:xfrm>
-            <a:prstGeom prst="flowChartProcess">
-              <a:avLst/>
-            </a:prstGeom>
-          </p:spPr>
-          <p:style>
-            <a:lnRef idx="2">
-              <a:schemeClr val="accent1">
-                <a:shade val="15000"/>
-              </a:schemeClr>
-            </a:lnRef>
-            <a:fillRef idx="1">
-              <a:schemeClr val="accent1"/>
-            </a:fillRef>
-            <a:effectRef idx="0">
-              <a:schemeClr val="accent1"/>
-            </a:effectRef>
-            <a:fontRef idx="minor">
-              <a:schemeClr val="lt1"/>
-            </a:fontRef>
-          </p:style>
-          <p:txBody>
-            <a:bodyPr rtlCol="0" anchor="ctr"/>
-            <a:lstStyle/>
-            <a:p>
-              <a:pPr algn="ctr"/>
-              <a:endParaRPr lang="ko-KR" altLang="en-US"/>
-            </a:p>
-          </p:txBody>
-        </p:sp>
-        <p:sp>
-          <p:nvSpPr>
-            <p:cNvPr id="10" name="TextBox 9">
-              <a:extLst>
-                <a:ext uri="{FF2B5EF4-FFF2-40B4-BE49-F238E27FC236}">
-                  <a16:creationId xmlns:a16="http://schemas.microsoft.com/office/drawing/2014/main" id="{11B6A23F-93A8-04C9-1863-3843ADB5DE3C}"/>
-                </a:ext>
-              </a:extLst>
-            </p:cNvPr>
-            <p:cNvSpPr txBox="1"/>
-            <p:nvPr/>
-          </p:nvSpPr>
-          <p:spPr>
-            <a:xfrm>
-              <a:off x="4723939" y="1792713"/>
-              <a:ext cx="2752436" cy="369332"/>
-            </a:xfrm>
-            <a:prstGeom prst="rect">
-              <a:avLst/>
-            </a:prstGeom>
-            <a:noFill/>
-          </p:spPr>
-          <p:txBody>
-            <a:bodyPr wrap="square" rtlCol="0">
-              <a:spAutoFit/>
-            </a:bodyPr>
-            <a:lstStyle/>
-            <a:p>
-              <a:pPr algn="ctr"/>
-              <a:r>
-                <a:rPr lang="ko-KR" altLang="en-US"/>
-                <a:t>게임 불러오기</a:t>
-              </a:r>
-            </a:p>
-          </p:txBody>
-        </p:sp>
-      </p:grpSp>
-      <p:grpSp>
-        <p:nvGrpSpPr>
-          <p:cNvPr id="11" name="그룹 10">
-            <a:extLst>
-              <a:ext uri="{FF2B5EF4-FFF2-40B4-BE49-F238E27FC236}">
-                <a16:creationId xmlns:a16="http://schemas.microsoft.com/office/drawing/2014/main" id="{372C4340-2646-4F42-3E0F-A6B473699C8B}"/>
-              </a:ext>
-            </a:extLst>
-          </p:cNvPr>
-          <p:cNvGrpSpPr/>
-          <p:nvPr/>
-        </p:nvGrpSpPr>
-        <p:grpSpPr>
-          <a:xfrm>
-            <a:off x="4535053" y="3276158"/>
-            <a:ext cx="3001818" cy="629669"/>
-            <a:chOff x="4572000" y="1662545"/>
-            <a:chExt cx="3001818" cy="629669"/>
-          </a:xfrm>
-        </p:grpSpPr>
-        <p:sp>
-          <p:nvSpPr>
-            <p:cNvPr id="12" name="순서도: 처리 11">
-              <a:extLst>
-                <a:ext uri="{FF2B5EF4-FFF2-40B4-BE49-F238E27FC236}">
-                  <a16:creationId xmlns:a16="http://schemas.microsoft.com/office/drawing/2014/main" id="{BC1D5B7A-300F-7A30-C345-4116A6DE25EA}"/>
-                </a:ext>
-              </a:extLst>
-            </p:cNvPr>
-            <p:cNvSpPr/>
-            <p:nvPr/>
-          </p:nvSpPr>
-          <p:spPr>
-            <a:xfrm>
-              <a:off x="4572000" y="1662545"/>
-              <a:ext cx="3001818" cy="629669"/>
-            </a:xfrm>
-            <a:prstGeom prst="flowChartProcess">
-              <a:avLst/>
-            </a:prstGeom>
-          </p:spPr>
-          <p:style>
-            <a:lnRef idx="2">
-              <a:schemeClr val="accent1">
-                <a:shade val="15000"/>
-              </a:schemeClr>
-            </a:lnRef>
-            <a:fillRef idx="1">
-              <a:schemeClr val="accent1"/>
-            </a:fillRef>
-            <a:effectRef idx="0">
-              <a:schemeClr val="accent1"/>
-            </a:effectRef>
-            <a:fontRef idx="minor">
-              <a:schemeClr val="lt1"/>
-            </a:fontRef>
-          </p:style>
-          <p:txBody>
-            <a:bodyPr rtlCol="0" anchor="ctr"/>
-            <a:lstStyle/>
-            <a:p>
-              <a:pPr algn="ctr"/>
-              <a:endParaRPr lang="ko-KR" altLang="en-US"/>
-            </a:p>
-          </p:txBody>
-        </p:sp>
-        <p:sp>
-          <p:nvSpPr>
-            <p:cNvPr id="13" name="TextBox 12">
-              <a:extLst>
-                <a:ext uri="{FF2B5EF4-FFF2-40B4-BE49-F238E27FC236}">
-                  <a16:creationId xmlns:a16="http://schemas.microsoft.com/office/drawing/2014/main" id="{7B758D1B-C046-D20E-993B-C92422EF8183}"/>
-                </a:ext>
-              </a:extLst>
-            </p:cNvPr>
-            <p:cNvSpPr txBox="1"/>
-            <p:nvPr/>
-          </p:nvSpPr>
-          <p:spPr>
-            <a:xfrm>
-              <a:off x="4723939" y="1792713"/>
-              <a:ext cx="2752436" cy="369332"/>
-            </a:xfrm>
-            <a:prstGeom prst="rect">
-              <a:avLst/>
-            </a:prstGeom>
-            <a:noFill/>
-          </p:spPr>
-          <p:txBody>
-            <a:bodyPr wrap="square" rtlCol="0">
-              <a:spAutoFit/>
-            </a:bodyPr>
-            <a:lstStyle/>
-            <a:p>
-              <a:pPr algn="ctr"/>
-              <a:r>
-                <a:rPr lang="ko-KR" altLang="en-US"/>
-                <a:t>설정</a:t>
-              </a:r>
-            </a:p>
-          </p:txBody>
-        </p:sp>
-      </p:grpSp>
-      <p:grpSp>
-        <p:nvGrpSpPr>
-          <p:cNvPr id="15" name="그룹 14">
-            <a:extLst>
-              <a:ext uri="{FF2B5EF4-FFF2-40B4-BE49-F238E27FC236}">
-                <a16:creationId xmlns:a16="http://schemas.microsoft.com/office/drawing/2014/main" id="{D69BA5F3-0337-547E-9392-E27D4B0E357C}"/>
-              </a:ext>
-            </a:extLst>
-          </p:cNvPr>
-          <p:cNvGrpSpPr/>
-          <p:nvPr/>
-        </p:nvGrpSpPr>
-        <p:grpSpPr>
-          <a:xfrm>
-            <a:off x="4535053" y="4082964"/>
-            <a:ext cx="3001818" cy="629669"/>
-            <a:chOff x="4572000" y="1662545"/>
-            <a:chExt cx="3001818" cy="629669"/>
-          </a:xfrm>
-        </p:grpSpPr>
-        <p:sp>
-          <p:nvSpPr>
-            <p:cNvPr id="16" name="순서도: 처리 15">
-              <a:extLst>
-                <a:ext uri="{FF2B5EF4-FFF2-40B4-BE49-F238E27FC236}">
-                  <a16:creationId xmlns:a16="http://schemas.microsoft.com/office/drawing/2014/main" id="{202EB158-32C9-69F4-4DC4-93318FB7068A}"/>
-                </a:ext>
-              </a:extLst>
-            </p:cNvPr>
-            <p:cNvSpPr/>
-            <p:nvPr/>
-          </p:nvSpPr>
-          <p:spPr>
-            <a:xfrm>
-              <a:off x="4572000" y="1662545"/>
-              <a:ext cx="3001818" cy="629669"/>
-            </a:xfrm>
-            <a:prstGeom prst="flowChartProcess">
-              <a:avLst/>
-            </a:prstGeom>
-          </p:spPr>
-          <p:style>
-            <a:lnRef idx="2">
-              <a:schemeClr val="accent1">
-                <a:shade val="15000"/>
-              </a:schemeClr>
-            </a:lnRef>
-            <a:fillRef idx="1">
-              <a:schemeClr val="accent1"/>
-            </a:fillRef>
-            <a:effectRef idx="0">
-              <a:schemeClr val="accent1"/>
-            </a:effectRef>
-            <a:fontRef idx="minor">
-              <a:schemeClr val="lt1"/>
-            </a:fontRef>
-          </p:style>
-          <p:txBody>
-            <a:bodyPr rtlCol="0" anchor="ctr"/>
-            <a:lstStyle/>
-            <a:p>
-              <a:pPr algn="ctr"/>
-              <a:endParaRPr lang="ko-KR" altLang="en-US"/>
-            </a:p>
-          </p:txBody>
-        </p:sp>
-        <p:sp>
-          <p:nvSpPr>
-            <p:cNvPr id="17" name="TextBox 16">
-              <a:extLst>
-                <a:ext uri="{FF2B5EF4-FFF2-40B4-BE49-F238E27FC236}">
-                  <a16:creationId xmlns:a16="http://schemas.microsoft.com/office/drawing/2014/main" id="{1BB53DA9-F5D7-ADCC-B8D0-196C666DE132}"/>
-                </a:ext>
-              </a:extLst>
-            </p:cNvPr>
-            <p:cNvSpPr txBox="1"/>
-            <p:nvPr/>
-          </p:nvSpPr>
-          <p:spPr>
-            <a:xfrm>
-              <a:off x="4723939" y="1792713"/>
-              <a:ext cx="2752436" cy="369332"/>
-            </a:xfrm>
-            <a:prstGeom prst="rect">
-              <a:avLst/>
-            </a:prstGeom>
-            <a:noFill/>
-          </p:spPr>
-          <p:txBody>
-            <a:bodyPr wrap="square" rtlCol="0">
-              <a:spAutoFit/>
-            </a:bodyPr>
-            <a:lstStyle/>
-            <a:p>
-              <a:pPr algn="ctr"/>
-              <a:r>
-                <a:rPr lang="ko-KR" altLang="en-US"/>
-                <a:t>저장 후 탐사 포기</a:t>
-              </a:r>
-            </a:p>
-          </p:txBody>
-        </p:sp>
-      </p:grpSp>
-      <p:grpSp>
-        <p:nvGrpSpPr>
-          <p:cNvPr id="14" name="그룹 13">
-            <a:extLst>
-              <a:ext uri="{FF2B5EF4-FFF2-40B4-BE49-F238E27FC236}">
-                <a16:creationId xmlns:a16="http://schemas.microsoft.com/office/drawing/2014/main" id="{81DC28DC-7038-0B83-8A76-05A3E6804847}"/>
-              </a:ext>
-            </a:extLst>
-          </p:cNvPr>
-          <p:cNvGrpSpPr/>
-          <p:nvPr/>
-        </p:nvGrpSpPr>
-        <p:grpSpPr>
-          <a:xfrm>
-            <a:off x="4562301" y="4889770"/>
-            <a:ext cx="3001818" cy="629669"/>
-            <a:chOff x="4572000" y="1662545"/>
-            <a:chExt cx="3001818" cy="629669"/>
-          </a:xfrm>
-        </p:grpSpPr>
-        <p:sp>
-          <p:nvSpPr>
-            <p:cNvPr id="18" name="순서도: 처리 17">
-              <a:extLst>
-                <a:ext uri="{FF2B5EF4-FFF2-40B4-BE49-F238E27FC236}">
-                  <a16:creationId xmlns:a16="http://schemas.microsoft.com/office/drawing/2014/main" id="{196E2F16-C741-3437-F880-6B75CD5F05E0}"/>
-                </a:ext>
-              </a:extLst>
-            </p:cNvPr>
-            <p:cNvSpPr/>
-            <p:nvPr/>
-          </p:nvSpPr>
-          <p:spPr>
-            <a:xfrm>
-              <a:off x="4572000" y="1662545"/>
-              <a:ext cx="3001818" cy="629669"/>
-            </a:xfrm>
-            <a:prstGeom prst="flowChartProcess">
-              <a:avLst/>
-            </a:prstGeom>
-          </p:spPr>
-          <p:style>
-            <a:lnRef idx="2">
-              <a:schemeClr val="accent1">
-                <a:shade val="15000"/>
-              </a:schemeClr>
-            </a:lnRef>
-            <a:fillRef idx="1">
-              <a:schemeClr val="accent1"/>
-            </a:fillRef>
-            <a:effectRef idx="0">
-              <a:schemeClr val="accent1"/>
-            </a:effectRef>
-            <a:fontRef idx="minor">
-              <a:schemeClr val="lt1"/>
-            </a:fontRef>
-          </p:style>
-          <p:txBody>
-            <a:bodyPr rtlCol="0" anchor="ctr"/>
-            <a:lstStyle/>
-            <a:p>
-              <a:pPr algn="ctr"/>
-              <a:endParaRPr lang="ko-KR" altLang="en-US"/>
-            </a:p>
-          </p:txBody>
-        </p:sp>
-        <p:sp>
-          <p:nvSpPr>
-            <p:cNvPr id="19" name="TextBox 18">
-              <a:extLst>
-                <a:ext uri="{FF2B5EF4-FFF2-40B4-BE49-F238E27FC236}">
-                  <a16:creationId xmlns:a16="http://schemas.microsoft.com/office/drawing/2014/main" id="{5DC585C5-3C90-7712-10A3-4FFDF111F0AC}"/>
-                </a:ext>
-              </a:extLst>
-            </p:cNvPr>
-            <p:cNvSpPr txBox="1"/>
-            <p:nvPr/>
-          </p:nvSpPr>
-          <p:spPr>
-            <a:xfrm>
-              <a:off x="4723939" y="1792713"/>
-              <a:ext cx="2752436" cy="369332"/>
-            </a:xfrm>
-            <a:prstGeom prst="rect">
-              <a:avLst/>
-            </a:prstGeom>
-            <a:noFill/>
-          </p:spPr>
-          <p:txBody>
-            <a:bodyPr wrap="square" rtlCol="0">
-              <a:spAutoFit/>
-            </a:bodyPr>
-            <a:lstStyle/>
-            <a:p>
-              <a:pPr algn="ctr"/>
-              <a:r>
-                <a:rPr lang="ko-KR" altLang="en-US"/>
-                <a:t>저장 후 게임 종료</a:t>
-              </a:r>
-            </a:p>
-          </p:txBody>
-        </p:sp>
-      </p:grpSp>
       <p:sp>
         <p:nvSpPr>
           <p:cNvPr id="21" name="자유형: 도형 20">
@@ -5545,12 +5122,321 @@
           </a:fontRef>
         </p:style>
       </p:cxnSp>
-      <p:sp>
-        <p:nvSpPr>
-          <p:cNvPr id="27" name="타원 26">
-            <a:extLst>
-              <a:ext uri="{FF2B5EF4-FFF2-40B4-BE49-F238E27FC236}">
-                <a16:creationId xmlns:a16="http://schemas.microsoft.com/office/drawing/2014/main" id="{44994C27-FC17-5CFA-E764-8E55111368AF}"/>
+      <p:grpSp>
+        <p:nvGrpSpPr>
+          <p:cNvPr id="40" name="그룹 39">
+            <a:extLst>
+              <a:ext uri="{FF2B5EF4-FFF2-40B4-BE49-F238E27FC236}">
+                <a16:creationId xmlns:a16="http://schemas.microsoft.com/office/drawing/2014/main" id="{BBC71F62-090D-CFD9-4B59-A2988767BC47}"/>
+              </a:ext>
+            </a:extLst>
+          </p:cNvPr>
+          <p:cNvGrpSpPr/>
+          <p:nvPr/>
+        </p:nvGrpSpPr>
+        <p:grpSpPr>
+          <a:xfrm>
+            <a:off x="4530666" y="2146437"/>
+            <a:ext cx="3001818" cy="629669"/>
+            <a:chOff x="4572000" y="1662545"/>
+            <a:chExt cx="3001818" cy="629669"/>
+          </a:xfrm>
+        </p:grpSpPr>
+        <p:sp>
+          <p:nvSpPr>
+            <p:cNvPr id="41" name="순서도: 처리 40">
+              <a:extLst>
+                <a:ext uri="{FF2B5EF4-FFF2-40B4-BE49-F238E27FC236}">
+                  <a16:creationId xmlns:a16="http://schemas.microsoft.com/office/drawing/2014/main" id="{6729C557-05D0-1372-18E4-D495357CEBBB}"/>
+                </a:ext>
+              </a:extLst>
+            </p:cNvPr>
+            <p:cNvSpPr/>
+            <p:nvPr/>
+          </p:nvSpPr>
+          <p:spPr>
+            <a:xfrm>
+              <a:off x="4572000" y="1662545"/>
+              <a:ext cx="3001818" cy="629669"/>
+            </a:xfrm>
+            <a:prstGeom prst="flowChartProcess">
+              <a:avLst/>
+            </a:prstGeom>
+          </p:spPr>
+          <p:style>
+            <a:lnRef idx="2">
+              <a:schemeClr val="accent1">
+                <a:shade val="15000"/>
+              </a:schemeClr>
+            </a:lnRef>
+            <a:fillRef idx="1">
+              <a:schemeClr val="accent1"/>
+            </a:fillRef>
+            <a:effectRef idx="0">
+              <a:schemeClr val="accent1"/>
+            </a:effectRef>
+            <a:fontRef idx="minor">
+              <a:schemeClr val="lt1"/>
+            </a:fontRef>
+          </p:style>
+          <p:txBody>
+            <a:bodyPr rtlCol="0" anchor="ctr"/>
+            <a:lstStyle/>
+            <a:p>
+              <a:pPr algn="ctr"/>
+              <a:endParaRPr lang="ko-KR" altLang="en-US"/>
+            </a:p>
+          </p:txBody>
+        </p:sp>
+        <p:sp>
+          <p:nvSpPr>
+            <p:cNvPr id="42" name="TextBox 41">
+              <a:extLst>
+                <a:ext uri="{FF2B5EF4-FFF2-40B4-BE49-F238E27FC236}">
+                  <a16:creationId xmlns:a16="http://schemas.microsoft.com/office/drawing/2014/main" id="{E3A3887D-CE45-9104-3E4C-07EC0D0094EA}"/>
+                </a:ext>
+              </a:extLst>
+            </p:cNvPr>
+            <p:cNvSpPr txBox="1"/>
+            <p:nvPr/>
+          </p:nvSpPr>
+          <p:spPr>
+            <a:xfrm>
+              <a:off x="4723939" y="1792713"/>
+              <a:ext cx="2752436" cy="369332"/>
+            </a:xfrm>
+            <a:prstGeom prst="rect">
+              <a:avLst/>
+            </a:prstGeom>
+            <a:noFill/>
+          </p:spPr>
+          <p:txBody>
+            <a:bodyPr wrap="square" rtlCol="0">
+              <a:spAutoFit/>
+            </a:bodyPr>
+            <a:lstStyle/>
+            <a:p>
+              <a:pPr algn="ctr"/>
+              <a:r>
+                <a:rPr lang="ko-KR" altLang="en-US"/>
+                <a:t>설정</a:t>
+              </a:r>
+            </a:p>
+          </p:txBody>
+        </p:sp>
+      </p:grpSp>
+      <p:grpSp>
+        <p:nvGrpSpPr>
+          <p:cNvPr id="43" name="그룹 42">
+            <a:extLst>
+              <a:ext uri="{FF2B5EF4-FFF2-40B4-BE49-F238E27FC236}">
+                <a16:creationId xmlns:a16="http://schemas.microsoft.com/office/drawing/2014/main" id="{73151EE5-88D5-D67D-77CD-D71F1F9579ED}"/>
+              </a:ext>
+            </a:extLst>
+          </p:cNvPr>
+          <p:cNvGrpSpPr/>
+          <p:nvPr/>
+        </p:nvGrpSpPr>
+        <p:grpSpPr>
+          <a:xfrm>
+            <a:off x="4530666" y="2953243"/>
+            <a:ext cx="3001818" cy="629669"/>
+            <a:chOff x="4572000" y="1662545"/>
+            <a:chExt cx="3001818" cy="629669"/>
+          </a:xfrm>
+        </p:grpSpPr>
+        <p:sp>
+          <p:nvSpPr>
+            <p:cNvPr id="44" name="순서도: 처리 43">
+              <a:extLst>
+                <a:ext uri="{FF2B5EF4-FFF2-40B4-BE49-F238E27FC236}">
+                  <a16:creationId xmlns:a16="http://schemas.microsoft.com/office/drawing/2014/main" id="{650369D3-48EB-0C3F-5C41-48A83CA3CB5D}"/>
+                </a:ext>
+              </a:extLst>
+            </p:cNvPr>
+            <p:cNvSpPr/>
+            <p:nvPr/>
+          </p:nvSpPr>
+          <p:spPr>
+            <a:xfrm>
+              <a:off x="4572000" y="1662545"/>
+              <a:ext cx="3001818" cy="629669"/>
+            </a:xfrm>
+            <a:prstGeom prst="flowChartProcess">
+              <a:avLst/>
+            </a:prstGeom>
+          </p:spPr>
+          <p:style>
+            <a:lnRef idx="2">
+              <a:schemeClr val="accent1">
+                <a:shade val="15000"/>
+              </a:schemeClr>
+            </a:lnRef>
+            <a:fillRef idx="1">
+              <a:schemeClr val="accent1"/>
+            </a:fillRef>
+            <a:effectRef idx="0">
+              <a:schemeClr val="accent1"/>
+            </a:effectRef>
+            <a:fontRef idx="minor">
+              <a:schemeClr val="lt1"/>
+            </a:fontRef>
+          </p:style>
+          <p:txBody>
+            <a:bodyPr rtlCol="0" anchor="ctr"/>
+            <a:lstStyle/>
+            <a:p>
+              <a:pPr algn="ctr"/>
+              <a:endParaRPr lang="ko-KR" altLang="en-US"/>
+            </a:p>
+          </p:txBody>
+        </p:sp>
+        <p:sp>
+          <p:nvSpPr>
+            <p:cNvPr id="45" name="TextBox 44">
+              <a:extLst>
+                <a:ext uri="{FF2B5EF4-FFF2-40B4-BE49-F238E27FC236}">
+                  <a16:creationId xmlns:a16="http://schemas.microsoft.com/office/drawing/2014/main" id="{1E6538A6-B1E9-0CE5-FEEF-B8DC537121E8}"/>
+                </a:ext>
+              </a:extLst>
+            </p:cNvPr>
+            <p:cNvSpPr txBox="1"/>
+            <p:nvPr/>
+          </p:nvSpPr>
+          <p:spPr>
+            <a:xfrm>
+              <a:off x="4723939" y="1792713"/>
+              <a:ext cx="2752436" cy="369332"/>
+            </a:xfrm>
+            <a:prstGeom prst="rect">
+              <a:avLst/>
+            </a:prstGeom>
+            <a:noFill/>
+          </p:spPr>
+          <p:txBody>
+            <a:bodyPr wrap="square" rtlCol="0">
+              <a:spAutoFit/>
+            </a:bodyPr>
+            <a:lstStyle/>
+            <a:p>
+              <a:pPr algn="ctr"/>
+              <a:r>
+                <a:rPr lang="ko-KR" altLang="en-US"/>
+                <a:t>저장 후 탐사 포기</a:t>
+              </a:r>
+            </a:p>
+          </p:txBody>
+        </p:sp>
+      </p:grpSp>
+      <p:grpSp>
+        <p:nvGrpSpPr>
+          <p:cNvPr id="46" name="그룹 45">
+            <a:extLst>
+              <a:ext uri="{FF2B5EF4-FFF2-40B4-BE49-F238E27FC236}">
+                <a16:creationId xmlns:a16="http://schemas.microsoft.com/office/drawing/2014/main" id="{5D4105C8-6A3A-5F35-BDDC-002F40A0F6F9}"/>
+              </a:ext>
+            </a:extLst>
+          </p:cNvPr>
+          <p:cNvGrpSpPr/>
+          <p:nvPr/>
+        </p:nvGrpSpPr>
+        <p:grpSpPr>
+          <a:xfrm>
+            <a:off x="4557914" y="3760049"/>
+            <a:ext cx="3001818" cy="629669"/>
+            <a:chOff x="4572000" y="1662545"/>
+            <a:chExt cx="3001818" cy="629669"/>
+          </a:xfrm>
+        </p:grpSpPr>
+        <p:sp>
+          <p:nvSpPr>
+            <p:cNvPr id="47" name="순서도: 처리 46">
+              <a:extLst>
+                <a:ext uri="{FF2B5EF4-FFF2-40B4-BE49-F238E27FC236}">
+                  <a16:creationId xmlns:a16="http://schemas.microsoft.com/office/drawing/2014/main" id="{E8173224-8808-3A05-509A-A4EFEEA07788}"/>
+                </a:ext>
+              </a:extLst>
+            </p:cNvPr>
+            <p:cNvSpPr/>
+            <p:nvPr/>
+          </p:nvSpPr>
+          <p:spPr>
+            <a:xfrm>
+              <a:off x="4572000" y="1662545"/>
+              <a:ext cx="3001818" cy="629669"/>
+            </a:xfrm>
+            <a:prstGeom prst="flowChartProcess">
+              <a:avLst/>
+            </a:prstGeom>
+          </p:spPr>
+          <p:style>
+            <a:lnRef idx="2">
+              <a:schemeClr val="accent1">
+                <a:shade val="15000"/>
+              </a:schemeClr>
+            </a:lnRef>
+            <a:fillRef idx="1">
+              <a:schemeClr val="accent1"/>
+            </a:fillRef>
+            <a:effectRef idx="0">
+              <a:schemeClr val="accent1"/>
+            </a:effectRef>
+            <a:fontRef idx="minor">
+              <a:schemeClr val="lt1"/>
+            </a:fontRef>
+          </p:style>
+          <p:txBody>
+            <a:bodyPr rtlCol="0" anchor="ctr"/>
+            <a:lstStyle/>
+            <a:p>
+              <a:pPr algn="ctr"/>
+              <a:endParaRPr lang="ko-KR" altLang="en-US"/>
+            </a:p>
+          </p:txBody>
+        </p:sp>
+        <p:sp>
+          <p:nvSpPr>
+            <p:cNvPr id="48" name="TextBox 47">
+              <a:extLst>
+                <a:ext uri="{FF2B5EF4-FFF2-40B4-BE49-F238E27FC236}">
+                  <a16:creationId xmlns:a16="http://schemas.microsoft.com/office/drawing/2014/main" id="{B987CBB3-DA48-80C9-57CE-DAE52A70FF6E}"/>
+                </a:ext>
+              </a:extLst>
+            </p:cNvPr>
+            <p:cNvSpPr txBox="1"/>
+            <p:nvPr/>
+          </p:nvSpPr>
+          <p:spPr>
+            <a:xfrm>
+              <a:off x="4723939" y="1792713"/>
+              <a:ext cx="2752436" cy="369332"/>
+            </a:xfrm>
+            <a:prstGeom prst="rect">
+              <a:avLst/>
+            </a:prstGeom>
+            <a:noFill/>
+          </p:spPr>
+          <p:txBody>
+            <a:bodyPr wrap="square" rtlCol="0">
+              <a:spAutoFit/>
+            </a:bodyPr>
+            <a:lstStyle/>
+            <a:p>
+              <a:pPr algn="ctr"/>
+              <a:r>
+                <a:rPr lang="ko-KR" altLang="en-US"/>
+                <a:t>저장 후 게임 종료</a:t>
+              </a:r>
+            </a:p>
+          </p:txBody>
+        </p:sp>
+      </p:grpSp>
+      <p:sp>
+        <p:nvSpPr>
+          <p:cNvPr id="49" name="타원 48">
+            <a:extLst>
+              <a:ext uri="{FF2B5EF4-FFF2-40B4-BE49-F238E27FC236}">
+                <a16:creationId xmlns:a16="http://schemas.microsoft.com/office/drawing/2014/main" id="{17BF3D8A-95AF-D021-9CE1-FFDA12F48AE7}"/>
               </a:ext>
             </a:extLst>
           </p:cNvPr>
@@ -5559,7 +5445,7 @@
         </p:nvSpPr>
         <p:spPr>
           <a:xfrm>
-            <a:off x="9149750" y="3046107"/>
+            <a:off x="9273309" y="2953243"/>
             <a:ext cx="738909" cy="720437"/>
           </a:xfrm>
           <a:prstGeom prst="ellipse">
@@ -5597,10 +5483,10 @@
       </p:sp>
       <p:sp>
         <p:nvSpPr>
-          <p:cNvPr id="28" name="자유형: 도형 27">
-            <a:extLst>
-              <a:ext uri="{FF2B5EF4-FFF2-40B4-BE49-F238E27FC236}">
-                <a16:creationId xmlns:a16="http://schemas.microsoft.com/office/drawing/2014/main" id="{DB940A43-B068-9F25-DE8E-EA72B1E43A8A}"/>
+          <p:cNvPr id="50" name="자유형: 도형 49">
+            <a:extLst>
+              <a:ext uri="{FF2B5EF4-FFF2-40B4-BE49-F238E27FC236}">
+                <a16:creationId xmlns:a16="http://schemas.microsoft.com/office/drawing/2014/main" id="{99F3ABA4-B133-D6EB-5FB2-8A65B906845D}"/>
               </a:ext>
             </a:extLst>
           </p:cNvPr>
@@ -5609,8 +5495,8 @@
         </p:nvSpPr>
         <p:spPr>
           <a:xfrm>
-            <a:off x="7536873" y="1671782"/>
-            <a:ext cx="472211" cy="3870036"/>
+            <a:off x="7539296" y="2130273"/>
+            <a:ext cx="472211" cy="2259445"/>
           </a:xfrm>
           <a:custGeom>
             <a:avLst/>
@@ -5698,23 +5584,22 @@
       </p:sp>
       <p:cxnSp>
         <p:nvCxnSpPr>
-          <p:cNvPr id="29" name="직선 연결선 28">
-            <a:extLst>
-              <a:ext uri="{FF2B5EF4-FFF2-40B4-BE49-F238E27FC236}">
-                <a16:creationId xmlns:a16="http://schemas.microsoft.com/office/drawing/2014/main" id="{78BE1500-16B4-8CF7-A99F-767C2D3A1244}"/>
+          <p:cNvPr id="51" name="직선 연결선 50">
+            <a:extLst>
+              <a:ext uri="{FF2B5EF4-FFF2-40B4-BE49-F238E27FC236}">
+                <a16:creationId xmlns:a16="http://schemas.microsoft.com/office/drawing/2014/main" id="{C31D1093-B7F3-1D00-F532-2CB0BB7A9886}"/>
               </a:ext>
             </a:extLst>
           </p:cNvPr>
           <p:cNvCxnSpPr>
             <a:cxnSpLocks/>
-            <a:endCxn id="27" idx="2"/>
           </p:cNvCxnSpPr>
           <p:nvPr/>
         </p:nvCxnSpPr>
         <p:spPr>
           <a:xfrm flipV="1">
-            <a:off x="8009084" y="3406326"/>
-            <a:ext cx="1140666" cy="230050"/>
+            <a:off x="7997192" y="3268077"/>
+            <a:ext cx="1276117" cy="81114"/>
           </a:xfrm>
           <a:prstGeom prst="line">
             <a:avLst/>
@@ -5740,6 +5625,99 @@
           </a:fontRef>
         </p:style>
       </p:cxnSp>
+      <p:cxnSp>
+        <p:nvCxnSpPr>
+          <p:cNvPr id="6" name="직선 연결선 5">
+            <a:extLst>
+              <a:ext uri="{FF2B5EF4-FFF2-40B4-BE49-F238E27FC236}">
+                <a16:creationId xmlns:a16="http://schemas.microsoft.com/office/drawing/2014/main" id="{4D4F1760-5FC1-A00D-E9B6-D75D0B890BCA}"/>
+              </a:ext>
+            </a:extLst>
+          </p:cNvPr>
+          <p:cNvCxnSpPr>
+            <a:cxnSpLocks/>
+          </p:cNvCxnSpPr>
+          <p:nvPr/>
+        </p:nvCxnSpPr>
+        <p:spPr>
+          <a:xfrm>
+            <a:off x="8174181" y="5804422"/>
+            <a:ext cx="1206477" cy="130169"/>
+          </a:xfrm>
+          <a:prstGeom prst="line">
+            <a:avLst/>
+          </a:prstGeom>
+          <a:ln>
+            <a:solidFill>
+              <a:schemeClr val="tx1"/>
+            </a:solidFill>
+          </a:ln>
+        </p:spPr>
+        <p:style>
+          <a:lnRef idx="1">
+            <a:schemeClr val="accent1"/>
+          </a:lnRef>
+          <a:fillRef idx="0">
+            <a:schemeClr val="accent1"/>
+          </a:fillRef>
+          <a:effectRef idx="0">
+            <a:schemeClr val="accent1"/>
+          </a:effectRef>
+          <a:fontRef idx="minor">
+            <a:schemeClr val="tx1"/>
+          </a:fontRef>
+        </p:style>
+      </p:cxnSp>
+      <p:sp>
+        <p:nvSpPr>
+          <p:cNvPr id="7" name="타원 6">
+            <a:extLst>
+              <a:ext uri="{FF2B5EF4-FFF2-40B4-BE49-F238E27FC236}">
+                <a16:creationId xmlns:a16="http://schemas.microsoft.com/office/drawing/2014/main" id="{85E9BCF7-7C54-1F59-3374-6F070C8EA78F}"/>
+              </a:ext>
+            </a:extLst>
+          </p:cNvPr>
+          <p:cNvSpPr/>
+          <p:nvPr/>
+        </p:nvSpPr>
+        <p:spPr>
+          <a:xfrm>
+            <a:off x="9245600" y="5591781"/>
+            <a:ext cx="738909" cy="720437"/>
+          </a:xfrm>
+          <a:prstGeom prst="ellipse">
+            <a:avLst/>
+          </a:prstGeom>
+        </p:spPr>
+        <p:style>
+          <a:lnRef idx="2">
+            <a:schemeClr val="accent1">
+              <a:shade val="15000"/>
+            </a:schemeClr>
+          </a:lnRef>
+          <a:fillRef idx="1">
+            <a:schemeClr val="accent1"/>
+          </a:fillRef>
+          <a:effectRef idx="0">
+            <a:schemeClr val="accent1"/>
+          </a:effectRef>
+          <a:fontRef idx="minor">
+            <a:schemeClr val="lt1"/>
+          </a:fontRef>
+        </p:style>
+        <p:txBody>
+          <a:bodyPr rtlCol="0" anchor="ctr"/>
+          <a:lstStyle/>
+          <a:p>
+            <a:pPr algn="ctr"/>
+            <a:r>
+              <a:rPr lang="en-US" altLang="ko-KR"/>
+              <a:t>5</a:t>
+            </a:r>
+            <a:endParaRPr lang="ko-KR" altLang="en-US"/>
+          </a:p>
+        </p:txBody>
+      </p:sp>
     </p:spTree>
     <p:extLst>
       <p:ext uri="{BB962C8B-B14F-4D97-AF65-F5344CB8AC3E}">
